--- a/海泩/家庭教育/assert/Math.pptx
+++ b/海泩/家庭教育/assert/Math.pptx
@@ -275,7 +275,7 @@
           <a:p>
             <a:fld id="{EF4E4798-33C2-F142-9124-DC0556E6F1A7}" type="datetimeFigureOut">
               <a:rPr lang="en-US" smtClean="0"/>
-              <a:t>7/10/26</a:t>
+              <a:t>7/20/26</a:t>
             </a:fld>
             <a:endParaRPr lang="en-US"/>
           </a:p>
@@ -445,7 +445,7 @@
           <a:p>
             <a:fld id="{EF4E4798-33C2-F142-9124-DC0556E6F1A7}" type="datetimeFigureOut">
               <a:rPr lang="en-US" smtClean="0"/>
-              <a:t>7/10/26</a:t>
+              <a:t>7/20/26</a:t>
             </a:fld>
             <a:endParaRPr lang="en-US"/>
           </a:p>
@@ -625,7 +625,7 @@
           <a:p>
             <a:fld id="{EF4E4798-33C2-F142-9124-DC0556E6F1A7}" type="datetimeFigureOut">
               <a:rPr lang="en-US" smtClean="0"/>
-              <a:t>7/10/26</a:t>
+              <a:t>7/20/26</a:t>
             </a:fld>
             <a:endParaRPr lang="en-US"/>
           </a:p>
@@ -795,7 +795,7 @@
           <a:p>
             <a:fld id="{EF4E4798-33C2-F142-9124-DC0556E6F1A7}" type="datetimeFigureOut">
               <a:rPr lang="en-US" smtClean="0"/>
-              <a:t>7/10/26</a:t>
+              <a:t>7/20/26</a:t>
             </a:fld>
             <a:endParaRPr lang="en-US"/>
           </a:p>
@@ -1041,7 +1041,7 @@
           <a:p>
             <a:fld id="{EF4E4798-33C2-F142-9124-DC0556E6F1A7}" type="datetimeFigureOut">
               <a:rPr lang="en-US" smtClean="0"/>
-              <a:t>7/10/26</a:t>
+              <a:t>7/20/26</a:t>
             </a:fld>
             <a:endParaRPr lang="en-US"/>
           </a:p>
@@ -1273,7 +1273,7 @@
           <a:p>
             <a:fld id="{EF4E4798-33C2-F142-9124-DC0556E6F1A7}" type="datetimeFigureOut">
               <a:rPr lang="en-US" smtClean="0"/>
-              <a:t>7/10/26</a:t>
+              <a:t>7/20/26</a:t>
             </a:fld>
             <a:endParaRPr lang="en-US"/>
           </a:p>
@@ -1640,7 +1640,7 @@
           <a:p>
             <a:fld id="{EF4E4798-33C2-F142-9124-DC0556E6F1A7}" type="datetimeFigureOut">
               <a:rPr lang="en-US" smtClean="0"/>
-              <a:t>7/10/26</a:t>
+              <a:t>7/20/26</a:t>
             </a:fld>
             <a:endParaRPr lang="en-US"/>
           </a:p>
@@ -1758,7 +1758,7 @@
           <a:p>
             <a:fld id="{EF4E4798-33C2-F142-9124-DC0556E6F1A7}" type="datetimeFigureOut">
               <a:rPr lang="en-US" smtClean="0"/>
-              <a:t>7/10/26</a:t>
+              <a:t>7/20/26</a:t>
             </a:fld>
             <a:endParaRPr lang="en-US"/>
           </a:p>
@@ -1853,7 +1853,7 @@
           <a:p>
             <a:fld id="{EF4E4798-33C2-F142-9124-DC0556E6F1A7}" type="datetimeFigureOut">
               <a:rPr lang="en-US" smtClean="0"/>
-              <a:t>7/10/26</a:t>
+              <a:t>7/20/26</a:t>
             </a:fld>
             <a:endParaRPr lang="en-US"/>
           </a:p>
@@ -2130,7 +2130,7 @@
           <a:p>
             <a:fld id="{EF4E4798-33C2-F142-9124-DC0556E6F1A7}" type="datetimeFigureOut">
               <a:rPr lang="en-US" smtClean="0"/>
-              <a:t>7/10/26</a:t>
+              <a:t>7/20/26</a:t>
             </a:fld>
             <a:endParaRPr lang="en-US"/>
           </a:p>
@@ -2387,7 +2387,7 @@
           <a:p>
             <a:fld id="{EF4E4798-33C2-F142-9124-DC0556E6F1A7}" type="datetimeFigureOut">
               <a:rPr lang="en-US" smtClean="0"/>
-              <a:t>7/10/26</a:t>
+              <a:t>7/20/26</a:t>
             </a:fld>
             <a:endParaRPr lang="en-US"/>
           </a:p>
@@ -2600,7 +2600,7 @@
           <a:p>
             <a:fld id="{EF4E4798-33C2-F142-9124-DC0556E6F1A7}" type="datetimeFigureOut">
               <a:rPr lang="en-US" smtClean="0"/>
-              <a:t>7/10/26</a:t>
+              <a:t>7/20/26</a:t>
             </a:fld>
             <a:endParaRPr lang="en-US"/>
           </a:p>
@@ -12880,7 +12880,7 @@
         <p:spPr>
           <a:xfrm>
             <a:off x="5702966" y="106441"/>
-            <a:ext cx="883575" cy="307777"/>
+            <a:ext cx="704039" cy="307777"/>
           </a:xfrm>
           <a:prstGeom prst="rect">
             <a:avLst/>
@@ -12900,6 +12900,8 @@
                     <a:lumMod val="50000"/>
                   </a:schemeClr>
                 </a:solidFill>
+                <a:latin typeface="STKaiti" panose="02010600040101010101" pitchFamily="2" charset="-122"/>
+                <a:ea typeface="STKaiti" panose="02010600040101010101" pitchFamily="2" charset="-122"/>
               </a:rPr>
               <a:t>@</a:t>
             </a:r>
@@ -12910,8 +12912,10 @@
                     <a:lumMod val="50000"/>
                   </a:schemeClr>
                 </a:solidFill>
+                <a:latin typeface="STKaiti" panose="02010600040101010101" pitchFamily="2" charset="-122"/>
+                <a:ea typeface="STKaiti" panose="02010600040101010101" pitchFamily="2" charset="-122"/>
               </a:rPr>
-              <a:t>一二七</a:t>
+              <a:t>海泩</a:t>
             </a:r>
             <a:endParaRPr lang="en-US" sz="1400" dirty="0">
               <a:solidFill>
@@ -12919,6 +12923,8 @@
                   <a:lumMod val="50000"/>
                 </a:schemeClr>
               </a:solidFill>
+              <a:latin typeface="STKaiti" panose="02010600040101010101" pitchFamily="2" charset="-122"/>
+              <a:ea typeface="STKaiti" panose="02010600040101010101" pitchFamily="2" charset="-122"/>
             </a:endParaRPr>
           </a:p>
         </p:txBody>
@@ -34483,7 +34489,7 @@
         <p:spPr>
           <a:xfrm>
             <a:off x="5698963" y="538224"/>
-            <a:ext cx="883575" cy="307777"/>
+            <a:ext cx="704039" cy="307777"/>
           </a:xfrm>
           <a:prstGeom prst="rect">
             <a:avLst/>
@@ -34514,7 +34520,7 @@
                   </a:schemeClr>
                 </a:solidFill>
               </a:rPr>
-              <a:t>一二七</a:t>
+              <a:t>海泩</a:t>
             </a:r>
             <a:endParaRPr lang="en-US" sz="1400" dirty="0">
               <a:solidFill>
@@ -34522,6 +34528,8 @@
                   <a:lumMod val="50000"/>
                 </a:schemeClr>
               </a:solidFill>
+              <a:latin typeface="STKaiti" panose="02010600040101010101" pitchFamily="2" charset="-122"/>
+              <a:ea typeface="STKaiti" panose="02010600040101010101" pitchFamily="2" charset="-122"/>
             </a:endParaRPr>
           </a:p>
         </p:txBody>
